--- a/assets/powerpoints/module-n6-relations/B3-le-petit-mot-qui-renvoie-a-ce-qui-precede.pptx
+++ b/assets/powerpoints/module-n6-relations/B3-le-petit-mot-qui-renvoie-a-ce-qui-precede.pptx
@@ -4223,7 +4223,7 @@
                 </a:solidFill>
                 <a:latin typeface="Verdana"/>
               </a:rPr>
-              <a:t>SÉANCE B3  ·  MODULE 3</a:t>
+              <a:t>SÉANCE B3  ·  MODULE 4</a:t>
             </a:r>
           </a:p>
         </p:txBody>
